--- a/docs/slides/pptx/M7_반복업무자동화.pptx
+++ b/docs/slides/pptx/M7_반복업무자동화.pptx
@@ -3148,7 +3148,7 @@
           </a:fontRef>
         </p:style>
         <p:txBody>
-          <a:bodyPr rtlCol="0" anchor="ctr"/>
+          <a:bodyPr rtlCol="0" anchor="t" wrap="square"/>
           <a:lstStyle/>
           <a:p>
             <a:pPr algn="ctr"/>
@@ -3192,7 +3192,7 @@
           </a:fontRef>
         </p:style>
         <p:txBody>
-          <a:bodyPr rtlCol="0" anchor="ctr"/>
+          <a:bodyPr rtlCol="0" anchor="t" wrap="square"/>
           <a:lstStyle/>
           <a:p>
             <a:pPr algn="ctr"/>
@@ -3236,7 +3236,7 @@
           </a:fontRef>
         </p:style>
         <p:txBody>
-          <a:bodyPr rtlCol="0" anchor="ctr"/>
+          <a:bodyPr rtlCol="0" anchor="t" wrap="square"/>
           <a:lstStyle/>
           <a:p>
             <a:pPr algn="ctr"/>
@@ -3280,7 +3280,7 @@
           </a:fontRef>
         </p:style>
         <p:txBody>
-          <a:bodyPr rtlCol="0" anchor="ctr"/>
+          <a:bodyPr rtlCol="0" anchor="t" wrap="square"/>
           <a:lstStyle/>
           <a:p>
             <a:pPr algn="ctr"/>
@@ -3324,7 +3324,7 @@
           </a:fontRef>
         </p:style>
         <p:txBody>
-          <a:bodyPr rtlCol="0" anchor="ctr"/>
+          <a:bodyPr rtlCol="0" anchor="t" wrap="square"/>
           <a:lstStyle/>
           <a:p>
             <a:pPr algn="ctr"/>
@@ -3368,7 +3368,7 @@
           </a:fontRef>
         </p:style>
         <p:txBody>
-          <a:bodyPr rtlCol="0" anchor="ctr"/>
+          <a:bodyPr rtlCol="0" anchor="t" wrap="square"/>
           <a:lstStyle/>
           <a:p>
             <a:pPr algn="ctr"/>
@@ -3412,7 +3412,7 @@
           </a:fontRef>
         </p:style>
         <p:txBody>
-          <a:bodyPr rtlCol="0" anchor="ctr"/>
+          <a:bodyPr rtlCol="0" anchor="t" wrap="square"/>
           <a:lstStyle/>
           <a:p>
             <a:pPr algn="ctr"/>
@@ -3624,7 +3624,7 @@
           </a:fontRef>
         </p:style>
         <p:txBody>
-          <a:bodyPr rtlCol="0" anchor="ctr"/>
+          <a:bodyPr rtlCol="0" anchor="t" wrap="square"/>
           <a:lstStyle/>
           <a:p>
             <a:pPr algn="ctr"/>
@@ -3926,7 +3926,7 @@
           </a:fontRef>
         </p:style>
         <p:txBody>
-          <a:bodyPr rtlCol="0" anchor="ctr"/>
+          <a:bodyPr rtlCol="0" anchor="t" wrap="square"/>
           <a:lstStyle/>
           <a:p>
             <a:pPr algn="ctr"/>
@@ -4230,7 +4230,7 @@
           </a:fontRef>
         </p:style>
         <p:txBody>
-          <a:bodyPr rtlCol="0" anchor="ctr"/>
+          <a:bodyPr rtlCol="0" anchor="t" wrap="square"/>
           <a:lstStyle/>
           <a:p>
             <a:pPr algn="ctr"/>
@@ -4345,10 +4345,10 @@
           </a:fontRef>
         </p:style>
         <p:txBody>
-          <a:bodyPr rtlCol="0" anchor="ctr" wrap="square" lIns="411480" rIns="365760" tIns="502920" bIns="320040"/>
-          <a:lstStyle/>
-          <a:p>
-            <a:pPr algn="ctr">
+          <a:bodyPr rtlCol="0" anchor="t" wrap="square" lIns="411480" rIns="365760" tIns="502920" bIns="320040"/>
+          <a:lstStyle/>
+          <a:p>
+            <a:pPr algn="l">
               <a:lnSpc>
                 <a:spcPct val="115000"/>
               </a:lnSpc>
@@ -4372,7 +4372,7 @@
             </a:r>
           </a:p>
           <a:p>
-            <a:pPr>
+            <a:pPr algn="l">
               <a:lnSpc>
                 <a:spcPct val="115000"/>
               </a:lnSpc>
@@ -4396,7 +4396,7 @@
             </a:r>
           </a:p>
           <a:p>
-            <a:pPr>
+            <a:pPr algn="l">
               <a:lnSpc>
                 <a:spcPct val="115000"/>
               </a:lnSpc>
@@ -4420,7 +4420,7 @@
             </a:r>
           </a:p>
           <a:p>
-            <a:pPr>
+            <a:pPr algn="l">
               <a:lnSpc>
                 <a:spcPct val="115000"/>
               </a:lnSpc>
@@ -4482,7 +4482,7 @@
           </a:fontRef>
         </p:style>
         <p:txBody>
-          <a:bodyPr rtlCol="0" anchor="ctr"/>
+          <a:bodyPr rtlCol="0" anchor="t" wrap="square"/>
           <a:lstStyle/>
           <a:p>
             <a:pPr algn="ctr"/>
@@ -4552,7 +4552,7 @@
           </a:fontRef>
         </p:style>
         <p:txBody>
-          <a:bodyPr rtlCol="0" anchor="ctr"/>
+          <a:bodyPr rtlCol="0" anchor="t" wrap="square"/>
           <a:lstStyle/>
           <a:p>
             <a:pPr algn="ctr"/>
@@ -4667,7 +4667,7 @@
           </a:fontRef>
         </p:style>
         <p:txBody>
-          <a:bodyPr rtlCol="0" anchor="ctr" wrap="square" lIns="365760" rIns="365760" tIns="228600" bIns="182880"/>
+          <a:bodyPr rtlCol="0" anchor="t" wrap="square" lIns="365760" rIns="365760" tIns="228600" bIns="182880"/>
           <a:lstStyle/>
           <a:p>
             <a:pPr algn="l">
@@ -4767,7 +4767,7 @@
           </a:fontRef>
         </p:style>
         <p:txBody>
-          <a:bodyPr rtlCol="0" anchor="ctr" wrap="square" lIns="365760" rIns="365760" tIns="201168" bIns="182880"/>
+          <a:bodyPr rtlCol="0" anchor="t" wrap="square" lIns="365760" rIns="365760" tIns="201168" bIns="182880"/>
           <a:lstStyle/>
           <a:p>
             <a:pPr algn="l">
@@ -4869,7 +4869,7 @@
           </a:fontRef>
         </p:style>
         <p:txBody>
-          <a:bodyPr rtlCol="0" anchor="ctr"/>
+          <a:bodyPr rtlCol="0" anchor="t" wrap="square"/>
           <a:lstStyle/>
           <a:p>
             <a:pPr algn="ctr"/>
@@ -5125,7 +5125,7 @@
           </a:fontRef>
         </p:style>
         <p:txBody>
-          <a:bodyPr rtlCol="0" anchor="ctr"/>
+          <a:bodyPr rtlCol="0" anchor="t" wrap="square"/>
           <a:lstStyle/>
           <a:p>
             <a:pPr algn="ctr"/>
@@ -5394,7 +5394,7 @@
           </a:fontRef>
         </p:style>
         <p:txBody>
-          <a:bodyPr rtlCol="0" anchor="ctr"/>
+          <a:bodyPr rtlCol="0" anchor="t" wrap="square"/>
           <a:lstStyle/>
           <a:p>
             <a:pPr algn="ctr"/>
@@ -5559,7 +5559,7 @@
           </a:fontRef>
         </p:style>
         <p:txBody>
-          <a:bodyPr rtlCol="0" anchor="ctr"/>
+          <a:bodyPr rtlCol="0" anchor="t" wrap="square"/>
           <a:lstStyle/>
           <a:p>
             <a:pPr algn="ctr"/>
@@ -5793,7 +5793,7 @@
           </a:fontRef>
         </p:style>
         <p:txBody>
-          <a:bodyPr rtlCol="0" anchor="ctr"/>
+          <a:bodyPr rtlCol="0" anchor="t" wrap="square"/>
           <a:lstStyle/>
           <a:p>
             <a:pPr algn="ctr"/>
@@ -6027,7 +6027,7 @@
           </a:fontRef>
         </p:style>
         <p:txBody>
-          <a:bodyPr rtlCol="0" anchor="ctr"/>
+          <a:bodyPr rtlCol="0" anchor="t" wrap="square"/>
           <a:lstStyle/>
           <a:p>
             <a:pPr algn="ctr"/>
@@ -6192,7 +6192,7 @@
           </a:fontRef>
         </p:style>
         <p:txBody>
-          <a:bodyPr rtlCol="0" anchor="ctr"/>
+          <a:bodyPr rtlCol="0" anchor="t" wrap="square"/>
           <a:lstStyle/>
           <a:p>
             <a:pPr algn="ctr"/>
@@ -6494,7 +6494,7 @@
           </a:fontRef>
         </p:style>
         <p:txBody>
-          <a:bodyPr rtlCol="0" anchor="ctr"/>
+          <a:bodyPr rtlCol="0" anchor="t" wrap="square"/>
           <a:lstStyle/>
           <a:p>
             <a:pPr algn="ctr"/>
@@ -6798,7 +6798,7 @@
           </a:fontRef>
         </p:style>
         <p:txBody>
-          <a:bodyPr rtlCol="0" anchor="ctr"/>
+          <a:bodyPr rtlCol="0" anchor="t" wrap="square"/>
           <a:lstStyle/>
           <a:p>
             <a:pPr algn="ctr"/>
@@ -6913,10 +6913,10 @@
           </a:fontRef>
         </p:style>
         <p:txBody>
-          <a:bodyPr rtlCol="0" anchor="ctr" wrap="square" lIns="411480" rIns="365760" tIns="502920" bIns="320040"/>
-          <a:lstStyle/>
-          <a:p>
-            <a:pPr algn="ctr">
+          <a:bodyPr rtlCol="0" anchor="t" wrap="square" lIns="411480" rIns="365760" tIns="502920" bIns="320040"/>
+          <a:lstStyle/>
+          <a:p>
+            <a:pPr algn="l">
               <a:lnSpc>
                 <a:spcPct val="115000"/>
               </a:lnSpc>
@@ -6940,7 +6940,7 @@
             </a:r>
           </a:p>
           <a:p>
-            <a:pPr>
+            <a:pPr algn="l">
               <a:lnSpc>
                 <a:spcPct val="115000"/>
               </a:lnSpc>
@@ -6964,7 +6964,7 @@
             </a:r>
           </a:p>
           <a:p>
-            <a:pPr>
+            <a:pPr algn="l">
               <a:lnSpc>
                 <a:spcPct val="115000"/>
               </a:lnSpc>
@@ -6988,7 +6988,7 @@
             </a:r>
           </a:p>
           <a:p>
-            <a:pPr>
+            <a:pPr algn="l">
               <a:lnSpc>
                 <a:spcPct val="115000"/>
               </a:lnSpc>
@@ -7012,7 +7012,7 @@
             </a:r>
           </a:p>
           <a:p>
-            <a:pPr>
+            <a:pPr algn="l">
               <a:lnSpc>
                 <a:spcPct val="115000"/>
               </a:lnSpc>
@@ -7074,7 +7074,7 @@
           </a:fontRef>
         </p:style>
         <p:txBody>
-          <a:bodyPr rtlCol="0" anchor="ctr"/>
+          <a:bodyPr rtlCol="0" anchor="t" wrap="square"/>
           <a:lstStyle/>
           <a:p>
             <a:pPr algn="ctr"/>
@@ -7144,7 +7144,7 @@
           </a:fontRef>
         </p:style>
         <p:txBody>
-          <a:bodyPr rtlCol="0" anchor="ctr"/>
+          <a:bodyPr rtlCol="0" anchor="t" wrap="square"/>
           <a:lstStyle/>
           <a:p>
             <a:pPr algn="ctr"/>
@@ -7259,7 +7259,7 @@
           </a:fontRef>
         </p:style>
         <p:txBody>
-          <a:bodyPr rtlCol="0" anchor="ctr" wrap="square" lIns="365760" rIns="365760" tIns="228600" bIns="182880"/>
+          <a:bodyPr rtlCol="0" anchor="t" wrap="square" lIns="365760" rIns="365760" tIns="228600" bIns="182880"/>
           <a:lstStyle/>
           <a:p>
             <a:pPr algn="l">
@@ -7394,7 +7394,7 @@
           </a:fontRef>
         </p:style>
         <p:txBody>
-          <a:bodyPr rtlCol="0" anchor="ctr" wrap="square" lIns="365760" rIns="365760" tIns="201168" bIns="182880"/>
+          <a:bodyPr rtlCol="0" anchor="t" wrap="square" lIns="365760" rIns="365760" tIns="201168" bIns="182880"/>
           <a:lstStyle/>
           <a:p>
             <a:pPr algn="l">
@@ -7496,7 +7496,7 @@
           </a:fontRef>
         </p:style>
         <p:txBody>
-          <a:bodyPr rtlCol="0" anchor="ctr"/>
+          <a:bodyPr rtlCol="0" anchor="t" wrap="square"/>
           <a:lstStyle/>
           <a:p>
             <a:pPr algn="ctr"/>
